--- a/docs/pptx/entire/ritu-entire-scatter-cg-epi-age80.pptx
+++ b/docs/pptx/entire/ritu-entire-scatter-cg-epi-age80.pptx
@@ -4760,7 +4760,7 @@
           </p:nvSpPr>
           <p:spPr>
             <a:xfrm>
-              <a:off x="3757867" y="4242157"/>
+              <a:off x="3757871" y="4242156"/>
               <a:ext cx="52362" cy="52362"/>
             </a:xfrm>
             <a:prstGeom prst="ellipse">
@@ -29820,7 +29820,7 @@
           </p:nvSpPr>
           <p:spPr>
             <a:xfrm>
-              <a:off x="7109168" y="3226038"/>
+              <a:off x="7109161" y="3226039"/>
               <a:ext cx="52362" cy="52362"/>
             </a:xfrm>
             <a:prstGeom prst="ellipse">
@@ -36067,7 +36067,7 @@
                     <a:pt x="325851" y="1776911"/>
                   </a:lnTo>
                   <a:lnTo>
-                    <a:pt x="488776" y="1733659"/>
+                    <a:pt x="488776" y="1733660"/>
                   </a:lnTo>
                   <a:lnTo>
                     <a:pt x="651702" y="1690366"/>
@@ -36079,7 +36079,7 @@
                     <a:pt x="977553" y="1603619"/>
                   </a:lnTo>
                   <a:lnTo>
-                    <a:pt x="1140479" y="1560142"/>
+                    <a:pt x="1140479" y="1560143"/>
                   </a:lnTo>
                   <a:lnTo>
                     <a:pt x="1303404" y="1516577"/>
@@ -36350,7 +36350,7 @@
                     <a:pt x="325851" y="1776911"/>
                   </a:lnTo>
                   <a:lnTo>
-                    <a:pt x="488776" y="1733659"/>
+                    <a:pt x="488776" y="1733660"/>
                   </a:lnTo>
                   <a:lnTo>
                     <a:pt x="651702" y="1690366"/>
@@ -36362,7 +36362,7 @@
                     <a:pt x="977553" y="1603619"/>
                   </a:lnTo>
                   <a:lnTo>
-                    <a:pt x="1140479" y="1560142"/>
+                    <a:pt x="1140479" y="1560143"/>
                   </a:lnTo>
                   <a:lnTo>
                     <a:pt x="1303404" y="1516577"/>
